--- a/documents/Презентация.pptx
+++ b/documents/Презентация.pptx
@@ -212,7 +212,7 @@
           <a:p>
             <a:fld id="{AAB9C017-FC77-4266-8AF5-C05C5903D06B}" type="datetimeFigureOut">
               <a:rPr lang="ru-RU" smtClean="0"/>
-              <a:t>06.06.2026</a:t>
+              <a:t>10.06.2026</a:t>
             </a:fld>
             <a:endParaRPr lang="ru-RU"/>
           </a:p>
@@ -909,7 +909,7 @@
           <a:p>
             <a:fld id="{480ADF75-5290-4ED9-B687-1CFF0508A65E}" type="datetimeFigureOut">
               <a:rPr lang="ru-RU" smtClean="0"/>
-              <a:t>06.06.2026</a:t>
+              <a:t>10.06.2026</a:t>
             </a:fld>
             <a:endParaRPr lang="ru-RU"/>
           </a:p>
@@ -1079,7 +1079,7 @@
           <a:p>
             <a:fld id="{480ADF75-5290-4ED9-B687-1CFF0508A65E}" type="datetimeFigureOut">
               <a:rPr lang="ru-RU" smtClean="0"/>
-              <a:t>06.06.2026</a:t>
+              <a:t>10.06.2026</a:t>
             </a:fld>
             <a:endParaRPr lang="ru-RU"/>
           </a:p>
@@ -1259,7 +1259,7 @@
           <a:p>
             <a:fld id="{480ADF75-5290-4ED9-B687-1CFF0508A65E}" type="datetimeFigureOut">
               <a:rPr lang="ru-RU" smtClean="0"/>
-              <a:t>06.06.2026</a:t>
+              <a:t>10.06.2026</a:t>
             </a:fld>
             <a:endParaRPr lang="ru-RU"/>
           </a:p>
@@ -1488,7 +1488,7 @@
           <a:p>
             <a:fld id="{480ADF75-5290-4ED9-B687-1CFF0508A65E}" type="datetimeFigureOut">
               <a:rPr lang="ru-RU" smtClean="0"/>
-              <a:t>06.06.2026</a:t>
+              <a:t>10.06.2026</a:t>
             </a:fld>
             <a:endParaRPr lang="ru-RU"/>
           </a:p>
@@ -1731,7 +1731,7 @@
           <a:p>
             <a:fld id="{480ADF75-5290-4ED9-B687-1CFF0508A65E}" type="datetimeFigureOut">
               <a:rPr lang="ru-RU" smtClean="0"/>
-              <a:t>06.06.2026</a:t>
+              <a:t>10.06.2026</a:t>
             </a:fld>
             <a:endParaRPr lang="ru-RU"/>
           </a:p>
@@ -1977,7 +1977,7 @@
           <a:p>
             <a:fld id="{480ADF75-5290-4ED9-B687-1CFF0508A65E}" type="datetimeFigureOut">
               <a:rPr lang="ru-RU" smtClean="0"/>
-              <a:t>06.06.2026</a:t>
+              <a:t>10.06.2026</a:t>
             </a:fld>
             <a:endParaRPr lang="ru-RU"/>
           </a:p>
@@ -2209,7 +2209,7 @@
           <a:p>
             <a:fld id="{480ADF75-5290-4ED9-B687-1CFF0508A65E}" type="datetimeFigureOut">
               <a:rPr lang="ru-RU" smtClean="0"/>
-              <a:t>06.06.2026</a:t>
+              <a:t>10.06.2026</a:t>
             </a:fld>
             <a:endParaRPr lang="ru-RU"/>
           </a:p>
@@ -2576,7 +2576,7 @@
           <a:p>
             <a:fld id="{480ADF75-5290-4ED9-B687-1CFF0508A65E}" type="datetimeFigureOut">
               <a:rPr lang="ru-RU" smtClean="0"/>
-              <a:t>06.06.2026</a:t>
+              <a:t>10.06.2026</a:t>
             </a:fld>
             <a:endParaRPr lang="ru-RU"/>
           </a:p>
@@ -2694,7 +2694,7 @@
           <a:p>
             <a:fld id="{480ADF75-5290-4ED9-B687-1CFF0508A65E}" type="datetimeFigureOut">
               <a:rPr lang="ru-RU" smtClean="0"/>
-              <a:t>06.06.2026</a:t>
+              <a:t>10.06.2026</a:t>
             </a:fld>
             <a:endParaRPr lang="ru-RU"/>
           </a:p>
@@ -2789,7 +2789,7 @@
           <a:p>
             <a:fld id="{480ADF75-5290-4ED9-B687-1CFF0508A65E}" type="datetimeFigureOut">
               <a:rPr lang="ru-RU" smtClean="0"/>
-              <a:t>06.06.2026</a:t>
+              <a:t>10.06.2026</a:t>
             </a:fld>
             <a:endParaRPr lang="ru-RU"/>
           </a:p>
@@ -3066,7 +3066,7 @@
           <a:p>
             <a:fld id="{480ADF75-5290-4ED9-B687-1CFF0508A65E}" type="datetimeFigureOut">
               <a:rPr lang="ru-RU" smtClean="0"/>
-              <a:t>06.06.2026</a:t>
+              <a:t>10.06.2026</a:t>
             </a:fld>
             <a:endParaRPr lang="ru-RU"/>
           </a:p>
@@ -3323,7 +3323,7 @@
           <a:p>
             <a:fld id="{480ADF75-5290-4ED9-B687-1CFF0508A65E}" type="datetimeFigureOut">
               <a:rPr lang="ru-RU" smtClean="0"/>
-              <a:t>06.06.2026</a:t>
+              <a:t>10.06.2026</a:t>
             </a:fld>
             <a:endParaRPr lang="ru-RU"/>
           </a:p>
@@ -3536,7 +3536,7 @@
           <a:p>
             <a:fld id="{480ADF75-5290-4ED9-B687-1CFF0508A65E}" type="datetimeFigureOut">
               <a:rPr lang="ru-RU" smtClean="0"/>
-              <a:t>06.06.2026</a:t>
+              <a:t>10.06.2026</a:t>
             </a:fld>
             <a:endParaRPr lang="ru-RU"/>
           </a:p>
@@ -4571,7 +4571,7 @@
     <mc:Choice Requires="p159">
       <p:transition/>
     </mc:Choice>
-    <mc:Fallback xmlns:w="http://schemas.openxmlformats.org/wordprocessingml/2006/main" xmlns:m="http://schemas.openxmlformats.org/officeDocument/2006/math" xmlns="">
+    <mc:Fallback xmlns="" xmlns:m="http://schemas.openxmlformats.org/officeDocument/2006/math" xmlns:w="http://schemas.openxmlformats.org/wordprocessingml/2006/main">
       <p:transition advClick="1"/>
     </mc:Fallback>
   </mc:AlternateContent>
@@ -7411,7 +7411,7 @@
     <mc:Choice Requires="p159">
       <p:transition/>
     </mc:Choice>
-    <mc:Fallback xmlns:w="http://schemas.openxmlformats.org/wordprocessingml/2006/main" xmlns:m="http://schemas.openxmlformats.org/officeDocument/2006/math" xmlns="">
+    <mc:Fallback xmlns="" xmlns:m="http://schemas.openxmlformats.org/officeDocument/2006/math" xmlns:w="http://schemas.openxmlformats.org/wordprocessingml/2006/main">
       <p:transition advClick="1"/>
     </mc:Fallback>
   </mc:AlternateContent>
@@ -9285,12 +9285,108 @@
           <a:chExt cx="0" cy="0"/>
         </a:xfrm>
       </p:grpSpPr>
+      <p:sp>
+        <p:nvSpPr>
+          <p:cNvPr id="2" name="Объект 1">
+            <a:extLst>
+              <a:ext uri="{FF2B5EF4-FFF2-40B4-BE49-F238E27FC236}">
+                <a16:creationId xmlns:a16="http://schemas.microsoft.com/office/drawing/2014/main" id="{37EFEEC7-36E9-9CAD-D2C7-D7E8BD764C0E}"/>
+              </a:ext>
+            </a:extLst>
+          </p:cNvPr>
+          <p:cNvSpPr>
+            <a:spLocks noGrp="1"/>
+          </p:cNvSpPr>
+          <p:nvPr>
+            <p:ph idx="1"/>
+          </p:nvPr>
+        </p:nvSpPr>
+        <p:spPr>
+          <a:xfrm>
+            <a:off x="590372" y="1210213"/>
+            <a:ext cx="5937738" cy="4974147"/>
+          </a:xfrm>
+        </p:spPr>
+        <p:txBody>
+          <a:bodyPr>
+            <a:normAutofit/>
+          </a:bodyPr>
+          <a:lstStyle/>
+          <a:p>
+            <a:pPr marL="0" indent="0">
+              <a:lnSpc>
+                <a:spcPct val="100000"/>
+              </a:lnSpc>
+              <a:buNone/>
+            </a:pPr>
+            <a:r>
+              <a:rPr lang="ru-RU" sz="2400" dirty="0">
+                <a:solidFill>
+                  <a:schemeClr val="tx1"/>
+                </a:solidFill>
+                <a:latin typeface="Times New Roman" panose="02020603050405020304" pitchFamily="18" charset="0"/>
+                <a:cs typeface="Times New Roman" panose="02020603050405020304" pitchFamily="18" charset="0"/>
+              </a:rPr>
+              <a:t>Основной функционал:</a:t>
+            </a:r>
+          </a:p>
+        </p:txBody>
+      </p:sp>
+      <p:sp>
+        <p:nvSpPr>
+          <p:cNvPr id="3" name="Заголовок 2">
+            <a:extLst>
+              <a:ext uri="{FF2B5EF4-FFF2-40B4-BE49-F238E27FC236}">
+                <a16:creationId xmlns:a16="http://schemas.microsoft.com/office/drawing/2014/main" id="{D99777C9-67F0-FD69-F6C9-73446124D8CC}"/>
+              </a:ext>
+            </a:extLst>
+          </p:cNvPr>
+          <p:cNvSpPr>
+            <a:spLocks noGrp="1"/>
+          </p:cNvSpPr>
+          <p:nvPr>
+            <p:ph type="title"/>
+          </p:nvPr>
+        </p:nvSpPr>
+        <p:spPr>
+          <a:xfrm>
+            <a:off x="590372" y="372522"/>
+            <a:ext cx="8202474" cy="697717"/>
+          </a:xfrm>
+        </p:spPr>
+        <p:txBody>
+          <a:bodyPr/>
+          <a:lstStyle/>
+          <a:p>
+            <a:r>
+              <a:rPr lang="en-US" dirty="0">
+                <a:solidFill>
+                  <a:schemeClr val="tx1"/>
+                </a:solidFill>
+                <a:latin typeface="Times New Roman" panose="02020603050405020304" pitchFamily="18" charset="0"/>
+                <a:cs typeface="Times New Roman" panose="02020603050405020304" pitchFamily="18" charset="0"/>
+              </a:rPr>
+              <a:t>Use-case </a:t>
+            </a:r>
+            <a:r>
+              <a:rPr lang="ru-RU" dirty="0">
+                <a:solidFill>
+                  <a:schemeClr val="tx1"/>
+                </a:solidFill>
+                <a:latin typeface="Times New Roman" panose="02020603050405020304" pitchFamily="18" charset="0"/>
+                <a:cs typeface="Times New Roman" panose="02020603050405020304" pitchFamily="18" charset="0"/>
+              </a:rPr>
+              <a:t>диаграмма</a:t>
+            </a:r>
+          </a:p>
+        </p:txBody>
+      </p:sp>
       <p:pic>
         <p:nvPicPr>
-          <p:cNvPr id="8" name="Рисунок 7">
+          <p:cNvPr id="7" name="Рисунок 6">
             <a:extLst>
               <a:ext uri="{FF2B5EF4-FFF2-40B4-BE49-F238E27FC236}">
-                <a16:creationId xmlns:a16="http://schemas.microsoft.com/office/drawing/2014/main" id="{CB340A2B-CCD1-DB71-D3B4-0274626AFE2F}"/>
+                <a16:creationId xmlns:a16="http://schemas.microsoft.com/office/drawing/2014/main" id="{679AD38E-CCAB-F385-9714-4EA8B1A5252D}"/>
               </a:ext>
             </a:extLst>
           </p:cNvPr>
@@ -9313,110 +9409,14 @@
         </p:blipFill>
         <p:spPr>
           <a:xfrm>
-            <a:off x="4587683" y="174282"/>
-            <a:ext cx="7013945" cy="6010078"/>
+            <a:off x="5562599" y="0"/>
+            <a:ext cx="6629401" cy="6858000"/>
           </a:xfrm>
           <a:prstGeom prst="rect">
             <a:avLst/>
           </a:prstGeom>
         </p:spPr>
       </p:pic>
-      <p:sp>
-        <p:nvSpPr>
-          <p:cNvPr id="2" name="Объект 1">
-            <a:extLst>
-              <a:ext uri="{FF2B5EF4-FFF2-40B4-BE49-F238E27FC236}">
-                <a16:creationId xmlns:a16="http://schemas.microsoft.com/office/drawing/2014/main" id="{37EFEEC7-36E9-9CAD-D2C7-D7E8BD764C0E}"/>
-              </a:ext>
-            </a:extLst>
-          </p:cNvPr>
-          <p:cNvSpPr>
-            <a:spLocks noGrp="1"/>
-          </p:cNvSpPr>
-          <p:nvPr>
-            <p:ph idx="1"/>
-          </p:nvPr>
-        </p:nvSpPr>
-        <p:spPr>
-          <a:xfrm>
-            <a:off x="590372" y="1210213"/>
-            <a:ext cx="5937738" cy="4974147"/>
-          </a:xfrm>
-        </p:spPr>
-        <p:txBody>
-          <a:bodyPr>
-            <a:normAutofit/>
-          </a:bodyPr>
-          <a:lstStyle/>
-          <a:p>
-            <a:pPr marL="0" indent="0">
-              <a:lnSpc>
-                <a:spcPct val="100000"/>
-              </a:lnSpc>
-              <a:buNone/>
-            </a:pPr>
-            <a:r>
-              <a:rPr lang="ru-RU" sz="2400" dirty="0">
-                <a:solidFill>
-                  <a:schemeClr val="tx1"/>
-                </a:solidFill>
-                <a:latin typeface="Times New Roman" panose="02020603050405020304" pitchFamily="18" charset="0"/>
-                <a:cs typeface="Times New Roman" panose="02020603050405020304" pitchFamily="18" charset="0"/>
-              </a:rPr>
-              <a:t>Основной функционал:</a:t>
-            </a:r>
-          </a:p>
-        </p:txBody>
-      </p:sp>
-      <p:sp>
-        <p:nvSpPr>
-          <p:cNvPr id="3" name="Заголовок 2">
-            <a:extLst>
-              <a:ext uri="{FF2B5EF4-FFF2-40B4-BE49-F238E27FC236}">
-                <a16:creationId xmlns:a16="http://schemas.microsoft.com/office/drawing/2014/main" id="{D99777C9-67F0-FD69-F6C9-73446124D8CC}"/>
-              </a:ext>
-            </a:extLst>
-          </p:cNvPr>
-          <p:cNvSpPr>
-            <a:spLocks noGrp="1"/>
-          </p:cNvSpPr>
-          <p:nvPr>
-            <p:ph type="title"/>
-          </p:nvPr>
-        </p:nvSpPr>
-        <p:spPr>
-          <a:xfrm>
-            <a:off x="590372" y="372522"/>
-            <a:ext cx="8202474" cy="697717"/>
-          </a:xfrm>
-        </p:spPr>
-        <p:txBody>
-          <a:bodyPr/>
-          <a:lstStyle/>
-          <a:p>
-            <a:r>
-              <a:rPr lang="en-US" dirty="0">
-                <a:solidFill>
-                  <a:schemeClr val="tx1"/>
-                </a:solidFill>
-                <a:latin typeface="Times New Roman" panose="02020603050405020304" pitchFamily="18" charset="0"/>
-                <a:cs typeface="Times New Roman" panose="02020603050405020304" pitchFamily="18" charset="0"/>
-              </a:rPr>
-              <a:t>Use-case </a:t>
-            </a:r>
-            <a:r>
-              <a:rPr lang="ru-RU" dirty="0">
-                <a:solidFill>
-                  <a:schemeClr val="tx1"/>
-                </a:solidFill>
-                <a:latin typeface="Times New Roman" panose="02020603050405020304" pitchFamily="18" charset="0"/>
-                <a:cs typeface="Times New Roman" panose="02020603050405020304" pitchFamily="18" charset="0"/>
-              </a:rPr>
-              <a:t>диаграмма</a:t>
-            </a:r>
-          </a:p>
-        </p:txBody>
-      </p:sp>
     </p:spTree>
     <p:extLst>
       <p:ext uri="{BB962C8B-B14F-4D97-AF65-F5344CB8AC3E}">

--- a/documents/Презентация.pptx
+++ b/documents/Презентация.pptx
@@ -4571,7 +4571,7 @@
     <mc:Choice Requires="p159">
       <p:transition/>
     </mc:Choice>
-    <mc:Fallback xmlns="" xmlns:m="http://schemas.openxmlformats.org/officeDocument/2006/math" xmlns:w="http://schemas.openxmlformats.org/wordprocessingml/2006/main">
+    <mc:Fallback xmlns:w="http://schemas.openxmlformats.org/wordprocessingml/2006/main" xmlns:m="http://schemas.openxmlformats.org/officeDocument/2006/math" xmlns="">
       <p:transition advClick="1"/>
     </mc:Fallback>
   </mc:AlternateContent>
@@ -7411,7 +7411,7 @@
     <mc:Choice Requires="p159">
       <p:transition/>
     </mc:Choice>
-    <mc:Fallback xmlns="" xmlns:m="http://schemas.openxmlformats.org/officeDocument/2006/math" xmlns:w="http://schemas.openxmlformats.org/wordprocessingml/2006/main">
+    <mc:Fallback xmlns:w="http://schemas.openxmlformats.org/wordprocessingml/2006/main" xmlns:m="http://schemas.openxmlformats.org/officeDocument/2006/math" xmlns="">
       <p:transition advClick="1"/>
     </mc:Fallback>
   </mc:AlternateContent>
@@ -7796,7 +7796,17 @@
                 <a:latin typeface="Times New Roman" panose="02020603050405020304" pitchFamily="18" charset="0"/>
                 <a:cs typeface="Times New Roman" panose="02020603050405020304" pitchFamily="18" charset="0"/>
               </a:rPr>
-              <a:t>Спроектировать БД с</a:t>
+              <a:t>Спроектировать БД с </a:t>
+            </a:r>
+            <a:r>
+              <a:rPr lang="ru-RU" sz="2000">
+                <a:solidFill>
+                  <a:schemeClr val="tx1"/>
+                </a:solidFill>
+                <a:latin typeface="Times New Roman" panose="02020603050405020304" pitchFamily="18" charset="0"/>
+                <a:cs typeface="Times New Roman" panose="02020603050405020304" pitchFamily="18" charset="0"/>
+              </a:rPr>
+              <a:t>поддержкой ответвлений</a:t>
             </a:r>
             <a:endParaRPr lang="en-US" sz="2000" dirty="0">
               <a:solidFill>
